--- a/public/downloads/praesentation/M21.pptx
+++ b/public/downloads/praesentation/M21.pptx
@@ -6324,7 +6324,7 @@
                   </a:txBody>
                   <a:tcPr>
                     <a:solidFill>
-                      <a:srgbClr val="191D2E"/>
+                      <a:srgbClr val="1F2B56"/>
                     </a:solidFill>
                   </a:tcPr>
                 </a:tc>
@@ -6346,7 +6346,7 @@
                   </a:txBody>
                   <a:tcPr>
                     <a:solidFill>
-                      <a:srgbClr val="191D2E"/>
+                      <a:srgbClr val="1F2B56"/>
                     </a:solidFill>
                   </a:tcPr>
                 </a:tc>
@@ -6368,7 +6368,7 @@
                   </a:txBody>
                   <a:tcPr>
                     <a:solidFill>
-                      <a:srgbClr val="191D2E"/>
+                      <a:srgbClr val="1F2B56"/>
                     </a:solidFill>
                   </a:tcPr>
                 </a:tc>
@@ -11812,8 +11812,8 @@
         </p:nvSpPr>
         <p:spPr>
           <a:xfrm>
-            <a:off x="4064000" y="927100"/>
-            <a:ext cx="508000" cy="647700"/>
+            <a:off x="4064000" y="939799"/>
+            <a:ext cx="762000" cy="647700"/>
           </a:xfrm>
           <a:prstGeom prst="rect">
             <a:avLst/>
@@ -11821,20 +11821,20 @@
           <a:noFill/>
         </p:spPr>
         <p:txBody>
-          <a:bodyPr wrap="square">
+          <a:bodyPr wrap="none">
             <a:normAutofit/>
           </a:bodyPr>
           <a:lstStyle/>
           <a:p>
             <a:pPr algn="l"/>
             <a:r>
-              <a:rPr sz="2600" b="0" i="1">
+              <a:rPr sz="2400" b="0" i="1">
                 <a:solidFill>
                   <a:srgbClr val="1F2B56"/>
                 </a:solidFill>
                 <a:latin typeface="Georgia"/>
               </a:rPr>
-              <a:t>I.</a:t>
+              <a:t>I</a:t>
             </a:r>
           </a:p>
         </p:txBody>
@@ -11847,8 +11847,8 @@
         </p:nvSpPr>
         <p:spPr>
           <a:xfrm>
-            <a:off x="4699000" y="952500"/>
-            <a:ext cx="6858000" cy="622300"/>
+            <a:off x="4953000" y="952500"/>
+            <a:ext cx="6629400" cy="635000"/>
           </a:xfrm>
           <a:prstGeom prst="rect">
             <a:avLst/>
@@ -11882,7 +11882,7 @@
         </p:nvSpPr>
         <p:spPr>
           <a:xfrm>
-            <a:off x="4064000" y="1574800"/>
+            <a:off x="4064000" y="1587500"/>
             <a:ext cx="7518399" cy="6350"/>
           </a:xfrm>
           <a:prstGeom prst="rect">
@@ -11925,8 +11925,8 @@
         </p:nvSpPr>
         <p:spPr>
           <a:xfrm>
-            <a:off x="4064000" y="1612900"/>
-            <a:ext cx="508000" cy="647700"/>
+            <a:off x="4064000" y="1638300"/>
+            <a:ext cx="762000" cy="647700"/>
           </a:xfrm>
           <a:prstGeom prst="rect">
             <a:avLst/>
@@ -11934,20 +11934,20 @@
           <a:noFill/>
         </p:spPr>
         <p:txBody>
-          <a:bodyPr wrap="square">
+          <a:bodyPr wrap="none">
             <a:normAutofit/>
           </a:bodyPr>
           <a:lstStyle/>
           <a:p>
             <a:pPr algn="l"/>
             <a:r>
-              <a:rPr sz="2600" b="0" i="1">
+              <a:rPr sz="2400" b="0" i="1">
                 <a:solidFill>
                   <a:srgbClr val="1F2B56"/>
                 </a:solidFill>
                 <a:latin typeface="Georgia"/>
               </a:rPr>
-              <a:t>II.</a:t>
+              <a:t>II</a:t>
             </a:r>
           </a:p>
         </p:txBody>
@@ -11960,8 +11960,8 @@
         </p:nvSpPr>
         <p:spPr>
           <a:xfrm>
-            <a:off x="4699000" y="1638300"/>
-            <a:ext cx="6858000" cy="622300"/>
+            <a:off x="4953000" y="1651000"/>
+            <a:ext cx="6629400" cy="635000"/>
           </a:xfrm>
           <a:prstGeom prst="rect">
             <a:avLst/>
@@ -11995,7 +11995,7 @@
         </p:nvSpPr>
         <p:spPr>
           <a:xfrm>
-            <a:off x="4064000" y="2260600"/>
+            <a:off x="4064000" y="2286000"/>
             <a:ext cx="7518399" cy="6350"/>
           </a:xfrm>
           <a:prstGeom prst="rect">
@@ -12038,8 +12038,8 @@
         </p:nvSpPr>
         <p:spPr>
           <a:xfrm>
-            <a:off x="4064000" y="2298700"/>
-            <a:ext cx="508000" cy="647700"/>
+            <a:off x="4064000" y="2336800"/>
+            <a:ext cx="762000" cy="647700"/>
           </a:xfrm>
           <a:prstGeom prst="rect">
             <a:avLst/>
@@ -12047,20 +12047,20 @@
           <a:noFill/>
         </p:spPr>
         <p:txBody>
-          <a:bodyPr wrap="square">
+          <a:bodyPr wrap="none">
             <a:normAutofit/>
           </a:bodyPr>
           <a:lstStyle/>
           <a:p>
             <a:pPr algn="l"/>
             <a:r>
-              <a:rPr sz="2600" b="0" i="1">
+              <a:rPr sz="2400" b="0" i="1">
                 <a:solidFill>
                   <a:srgbClr val="1F2B56"/>
                 </a:solidFill>
                 <a:latin typeface="Georgia"/>
               </a:rPr>
-              <a:t>III.</a:t>
+              <a:t>III</a:t>
             </a:r>
           </a:p>
         </p:txBody>
@@ -12073,8 +12073,8 @@
         </p:nvSpPr>
         <p:spPr>
           <a:xfrm>
-            <a:off x="4699000" y="2324100"/>
-            <a:ext cx="6858000" cy="622300"/>
+            <a:off x="4953000" y="2349500"/>
+            <a:ext cx="6629400" cy="635000"/>
           </a:xfrm>
           <a:prstGeom prst="rect">
             <a:avLst/>
@@ -12108,7 +12108,7 @@
         </p:nvSpPr>
         <p:spPr>
           <a:xfrm>
-            <a:off x="4064000" y="2946400"/>
+            <a:off x="4064000" y="2984500"/>
             <a:ext cx="7518399" cy="6350"/>
           </a:xfrm>
           <a:prstGeom prst="rect">
@@ -12151,8 +12151,8 @@
         </p:nvSpPr>
         <p:spPr>
           <a:xfrm>
-            <a:off x="4064000" y="2984500"/>
-            <a:ext cx="508000" cy="647700"/>
+            <a:off x="4064000" y="3035300"/>
+            <a:ext cx="762000" cy="647700"/>
           </a:xfrm>
           <a:prstGeom prst="rect">
             <a:avLst/>
@@ -12160,20 +12160,20 @@
           <a:noFill/>
         </p:spPr>
         <p:txBody>
-          <a:bodyPr wrap="square">
+          <a:bodyPr wrap="none">
             <a:normAutofit/>
           </a:bodyPr>
           <a:lstStyle/>
           <a:p>
             <a:pPr algn="l"/>
             <a:r>
-              <a:rPr sz="2600" b="0" i="1">
+              <a:rPr sz="2400" b="0" i="1">
                 <a:solidFill>
                   <a:srgbClr val="1F2B56"/>
                 </a:solidFill>
                 <a:latin typeface="Georgia"/>
               </a:rPr>
-              <a:t>IV.</a:t>
+              <a:t>IV</a:t>
             </a:r>
           </a:p>
         </p:txBody>
@@ -12186,8 +12186,8 @@
         </p:nvSpPr>
         <p:spPr>
           <a:xfrm>
-            <a:off x="4699000" y="3009900"/>
-            <a:ext cx="6858000" cy="622300"/>
+            <a:off x="4953000" y="3048000"/>
+            <a:ext cx="6629400" cy="635000"/>
           </a:xfrm>
           <a:prstGeom prst="rect">
             <a:avLst/>
@@ -13430,7 +13430,7 @@
                   </a:txBody>
                   <a:tcPr>
                     <a:solidFill>
-                      <a:srgbClr val="191D2E"/>
+                      <a:srgbClr val="1F2B56"/>
                     </a:solidFill>
                   </a:tcPr>
                 </a:tc>
@@ -13452,7 +13452,7 @@
                   </a:txBody>
                   <a:tcPr>
                     <a:solidFill>
-                      <a:srgbClr val="191D2E"/>
+                      <a:srgbClr val="1F2B56"/>
                     </a:solidFill>
                   </a:tcPr>
                 </a:tc>
@@ -13474,7 +13474,7 @@
                   </a:txBody>
                   <a:tcPr>
                     <a:solidFill>
-                      <a:srgbClr val="191D2E"/>
+                      <a:srgbClr val="1F2B56"/>
                     </a:solidFill>
                   </a:tcPr>
                 </a:tc>
@@ -13496,7 +13496,7 @@
                   </a:txBody>
                   <a:tcPr>
                     <a:solidFill>
-                      <a:srgbClr val="191D2E"/>
+                      <a:srgbClr val="1F2B56"/>
                     </a:solidFill>
                   </a:tcPr>
                 </a:tc>
@@ -14600,7 +14600,7 @@
                   </a:txBody>
                   <a:tcPr>
                     <a:solidFill>
-                      <a:srgbClr val="191D2E"/>
+                      <a:srgbClr val="1F2B56"/>
                     </a:solidFill>
                   </a:tcPr>
                 </a:tc>
@@ -14622,7 +14622,7 @@
                   </a:txBody>
                   <a:tcPr>
                     <a:solidFill>
-                      <a:srgbClr val="191D2E"/>
+                      <a:srgbClr val="1F2B56"/>
                     </a:solidFill>
                   </a:tcPr>
                 </a:tc>
@@ -17517,7 +17517,7 @@
         <p:spPr>
           <a:xfrm>
             <a:off x="4826000" y="2984500"/>
-            <a:ext cx="6731000" cy="3048000"/>
+            <a:ext cx="6731000" cy="3429000"/>
           </a:xfrm>
           <a:prstGeom prst="rect">
             <a:avLst/>
@@ -17830,7 +17830,7 @@
                   </a:txBody>
                   <a:tcPr>
                     <a:solidFill>
-                      <a:srgbClr val="191D2E"/>
+                      <a:srgbClr val="1F2B56"/>
                     </a:solidFill>
                   </a:tcPr>
                 </a:tc>
@@ -17852,7 +17852,7 @@
                   </a:txBody>
                   <a:tcPr>
                     <a:solidFill>
-                      <a:srgbClr val="191D2E"/>
+                      <a:srgbClr val="1F2B56"/>
                     </a:solidFill>
                   </a:tcPr>
                 </a:tc>
@@ -17874,7 +17874,7 @@
                   </a:txBody>
                   <a:tcPr>
                     <a:solidFill>
-                      <a:srgbClr val="191D2E"/>
+                      <a:srgbClr val="1F2B56"/>
                     </a:solidFill>
                   </a:tcPr>
                 </a:tc>
@@ -17896,7 +17896,7 @@
                   </a:txBody>
                   <a:tcPr>
                     <a:solidFill>
-                      <a:srgbClr val="191D2E"/>
+                      <a:srgbClr val="1F2B56"/>
                     </a:solidFill>
                   </a:tcPr>
                 </a:tc>
@@ -19359,7 +19359,7 @@
     <p:bg>
       <p:bgPr>
         <a:solidFill>
-          <a:srgbClr val="191D2E"/>
+          <a:srgbClr val="1F2B56"/>
         </a:solidFill>
         <a:effectLst/>
       </p:bgPr>
@@ -21933,7 +21933,7 @@
     <p:bg>
       <p:bgPr>
         <a:solidFill>
-          <a:srgbClr val="191D2E"/>
+          <a:srgbClr val="1F2B56"/>
         </a:solidFill>
         <a:effectLst/>
       </p:bgPr>
@@ -22134,7 +22134,7 @@
     <p:bg>
       <p:bgPr>
         <a:solidFill>
-          <a:srgbClr val="191D2E"/>
+          <a:srgbClr val="1F2B56"/>
         </a:solidFill>
         <a:effectLst/>
       </p:bgPr>
@@ -22994,7 +22994,7 @@
                   </a:txBody>
                   <a:tcPr>
                     <a:solidFill>
-                      <a:srgbClr val="191D2E"/>
+                      <a:srgbClr val="1F2B56"/>
                     </a:solidFill>
                   </a:tcPr>
                 </a:tc>
@@ -23016,7 +23016,7 @@
                   </a:txBody>
                   <a:tcPr>
                     <a:solidFill>
-                      <a:srgbClr val="191D2E"/>
+                      <a:srgbClr val="1F2B56"/>
                     </a:solidFill>
                   </a:tcPr>
                 </a:tc>
@@ -23038,7 +23038,7 @@
                   </a:txBody>
                   <a:tcPr>
                     <a:solidFill>
-                      <a:srgbClr val="191D2E"/>
+                      <a:srgbClr val="1F2B56"/>
                     </a:solidFill>
                   </a:tcPr>
                 </a:tc>
@@ -23060,7 +23060,7 @@
                   </a:txBody>
                   <a:tcPr>
                     <a:solidFill>
-                      <a:srgbClr val="191D2E"/>
+                      <a:srgbClr val="1F2B56"/>
                     </a:solidFill>
                   </a:tcPr>
                 </a:tc>
@@ -23082,7 +23082,7 @@
                   </a:txBody>
                   <a:tcPr>
                     <a:solidFill>
-                      <a:srgbClr val="191D2E"/>
+                      <a:srgbClr val="1F2B56"/>
                     </a:solidFill>
                   </a:tcPr>
                 </a:tc>
